--- a/workshops/session2-ml-introduction.pptx
+++ b/workshops/session2-ml-introduction.pptx
@@ -508,7 +508,8 @@
           <a:p>
             <a:r>
               <a:rPr lang="en-US" dirty="0"/>
-              <a:t/>
+              <a:t>مرور جلسهٔ قبل و ورود به یادگیری ماشین.
+سؤال شروع: «چه تفاوتی بین انسان و ماشین در یادگیری وجود دارد؟»</a:t>
             </a:r>
             <a:endParaRPr lang="en-US" dirty="0"/>
           </a:p>
@@ -596,7 +597,7 @@
           <a:p>
             <a:r>
               <a:rPr lang="en-US" dirty="0"/>
-              <a:t/>
+              <a:t>مرور جلسهٔ قبل: سه رکن دستیار هوشمند (دانش، مهارت، ابزار) و خانوادهٔ AI.</a:t>
             </a:r>
             <a:endParaRPr lang="en-US" dirty="0"/>
           </a:p>
@@ -684,7 +685,11 @@
           <a:p>
             <a:r>
               <a:rPr lang="en-US" dirty="0"/>
-              <a:t/>
+              <a:t>مثال کارشده (روایت گام‌به‌گام):
+1. روی تخته سه داده بنویسید: ۸۰ متری = ۸ میلیارد، ۱۰۰ متری = ۱۰ میلیارد، ۱۲۰ متری = ۱۲ میلیارد.
+2. از کلاس بپرسید: «خانهٔ ۱۱۰ متری چقدر؟» — همه فوری می‌گویند ۱۱ میلیارد.
+3. نکتهٔ کلیدی: «شما همین‌الان یک مدل یادگیری ماشین شدید! الگو را از داده کشف کردید؛ کسی فرمول را به شما نگفته بود.»
+4. پل به جلسهٔ ۸: «مدل ما هم دقیقاً همین کار را با ۲ عدد (پارامتر) انجام می‌دهد.»</a:t>
             </a:r>
             <a:endParaRPr lang="en-US" dirty="0"/>
           </a:p>
@@ -772,7 +777,9 @@
           <a:p>
             <a:r>
               <a:rPr lang="en-US" dirty="0"/>
-              <a:t/>
+              <a:t>تصویر supervised.png را نشان دهید.
+توضیح دهید: در یادگیری نظارت‌شده، مدل از داده‌هایی یاد می‌گیرد که جواب‌شان مشخص است.
+مثال: عکس‌هایی از سگ و گربه که برچسب‌شان مشخص است → مدل یاد می‌گیرد.</a:t>
             </a:r>
             <a:endParaRPr lang="en-US" dirty="0"/>
           </a:p>
@@ -860,7 +867,8 @@
           <a:p>
             <a:r>
               <a:rPr lang="en-US" dirty="0"/>
-              <a:t/>
+              <a:t>انواع دیگر را فقط اشاره کنید. نیازی به جزئیات نیست.
+نکته: خودنظارتی را در جلسهٔ ۷ عمیق می‌شویم.</a:t>
             </a:r>
             <a:endParaRPr lang="en-US" dirty="0"/>
           </a:p>
@@ -948,7 +956,8 @@
           <a:p>
             <a:r>
               <a:rPr lang="en-US" dirty="0"/>
-              <a:t/>
+              <a:t>این سه مرحله را با اشاره به مثال خانه توضیح دهید.
+پل به جلسهٔ ۸: «همین مسیر را با کد واقعی طی می‌کنیم.»</a:t>
             </a:r>
             <a:endParaRPr lang="en-US" dirty="0"/>
           </a:p>
@@ -1036,7 +1045,8 @@
           <a:p>
             <a:r>
               <a:rPr lang="en-US" dirty="0"/>
-              <a:t/>
+              <a:t>خلاصهٔ سه نکتهٔ کلیدی.
+سؤال بسته‌شونده: «اگر بخواهید قیمت خانه را پیش‌بینی کنید، چه داده‌هایی نیاز دارید؟»</a:t>
             </a:r>
             <a:endParaRPr lang="en-US" dirty="0"/>
           </a:p>
@@ -1808,7 +1818,7 @@
       </p:sp>
       <p:sp>
         <p:nvSpPr>
-          <p:cNvPr id="5" name="Text 3"/>
+          <p:cNvPr id="6" name="Text 3"/>
           <p:cNvSpPr/>
           <p:nvPr/>
         </p:nvSpPr>
@@ -1847,7 +1857,7 @@
       </p:sp>
       <p:sp>
         <p:nvSpPr>
-          <p:cNvPr id="6" name="Text 4"/>
+          <p:cNvPr id="7" name="Text 4"/>
           <p:cNvSpPr/>
           <p:nvPr/>
         </p:nvSpPr>
@@ -2128,7 +2138,7 @@
       </p:sp>
       <p:sp>
         <p:nvSpPr>
-          <p:cNvPr id="5" name="Text 3"/>
+          <p:cNvPr id="6" name="Text 3"/>
           <p:cNvSpPr/>
           <p:nvPr/>
         </p:nvSpPr>
@@ -2167,7 +2177,7 @@
       </p:sp>
       <p:sp>
         <p:nvSpPr>
-          <p:cNvPr id="6" name="Text 4"/>
+          <p:cNvPr id="7" name="Text 4"/>
           <p:cNvSpPr/>
           <p:nvPr/>
         </p:nvSpPr>
@@ -2469,7 +2479,7 @@
       </p:sp>
       <p:sp>
         <p:nvSpPr>
-          <p:cNvPr id="7" name="Text 4"/>
+          <p:cNvPr id="8" name="Text 4"/>
           <p:cNvSpPr/>
           <p:nvPr/>
         </p:nvSpPr>
@@ -2508,7 +2518,7 @@
       </p:sp>
       <p:sp>
         <p:nvSpPr>
-          <p:cNvPr id="8" name="Text 5"/>
+          <p:cNvPr id="9" name="Text 5"/>
           <p:cNvSpPr/>
           <p:nvPr/>
         </p:nvSpPr>
@@ -3532,7 +3542,7 @@
       </p:sp>
       <p:sp>
         <p:nvSpPr>
-          <p:cNvPr id="6" name="Text 3"/>
+          <p:cNvPr id="7" name="Text 3"/>
           <p:cNvSpPr/>
           <p:nvPr/>
         </p:nvSpPr>
@@ -3571,7 +3581,7 @@
       </p:sp>
       <p:sp>
         <p:nvSpPr>
-          <p:cNvPr id="7" name="Text 4"/>
+          <p:cNvPr id="8" name="Text 4"/>
           <p:cNvSpPr/>
           <p:nvPr/>
         </p:nvSpPr>
@@ -4124,7 +4134,7 @@
       </p:sp>
       <p:sp>
         <p:nvSpPr>
-          <p:cNvPr id="17" name="Text 15"/>
+          <p:cNvPr id="18" name="Text 15"/>
           <p:cNvSpPr/>
           <p:nvPr/>
         </p:nvSpPr>
@@ -4163,7 +4173,7 @@
       </p:sp>
       <p:sp>
         <p:nvSpPr>
-          <p:cNvPr id="18" name="Text 16"/>
+          <p:cNvPr id="19" name="Text 16"/>
           <p:cNvSpPr/>
           <p:nvPr/>
         </p:nvSpPr>
@@ -4381,7 +4391,7 @@
       </p:sp>
       <p:sp>
         <p:nvSpPr>
-          <p:cNvPr id="5" name="Text 3"/>
+          <p:cNvPr id="6" name="Text 3"/>
           <p:cNvSpPr/>
           <p:nvPr/>
         </p:nvSpPr>
@@ -4420,7 +4430,7 @@
       </p:sp>
       <p:sp>
         <p:nvSpPr>
-          <p:cNvPr id="6" name="Text 4"/>
+          <p:cNvPr id="7" name="Text 4"/>
           <p:cNvSpPr/>
           <p:nvPr/>
         </p:nvSpPr>
